--- a/青年聖歌I/(青年聖歌I110)活著為耶穌.pptx
+++ b/青年聖歌I/(青年聖歌I110)活著為耶穌.pptx
@@ -169,10 +169,9 @@
           <a:lstStyle/>
           <a:p>
             <a:r>
-              <a:rPr lang="zh-TW" altLang="en-US" smtClean="0"/>
+              <a:rPr lang="zh-TW" altLang="en-US"/>
               <a:t>按一下以編輯母片標題樣式</a:t>
             </a:r>
-            <a:endParaRPr lang="zh-TW" altLang="en-US"/>
           </a:p>
         </p:txBody>
       </p:sp>
@@ -288,10 +287,9 @@
           </a:lstStyle>
           <a:p>
             <a:r>
-              <a:rPr lang="zh-TW" altLang="en-US" smtClean="0"/>
+              <a:rPr lang="zh-TW" altLang="en-US"/>
               <a:t>按一下以編輯母片副標題樣式</a:t>
             </a:r>
-            <a:endParaRPr lang="zh-TW" altLang="en-US"/>
           </a:p>
         </p:txBody>
       </p:sp>
@@ -313,7 +311,7 @@
             <a:fld id="{56B17361-AFF9-4A50-8FA1-CCBB1A96AC9B}" type="datetimeFigureOut">
               <a:rPr lang="zh-TW" altLang="en-US" smtClean="0"/>
               <a:pPr/>
-              <a:t>2023/4/22</a:t>
+              <a:t>2024/4/24</a:t>
             </a:fld>
             <a:endParaRPr lang="zh-TW" altLang="en-US"/>
           </a:p>
@@ -403,10 +401,9 @@
           <a:lstStyle/>
           <a:p>
             <a:r>
-              <a:rPr lang="zh-TW" altLang="en-US" smtClean="0"/>
+              <a:rPr lang="zh-TW" altLang="en-US"/>
               <a:t>按一下以編輯母片標題樣式</a:t>
             </a:r>
-            <a:endParaRPr lang="zh-TW" altLang="en-US"/>
           </a:p>
         </p:txBody>
       </p:sp>
@@ -427,38 +424,37 @@
           <a:p>
             <a:pPr lvl="0"/>
             <a:r>
-              <a:rPr lang="zh-TW" altLang="en-US" smtClean="0"/>
+              <a:rPr lang="zh-TW" altLang="en-US"/>
               <a:t>按一下以編輯母片文字樣式</a:t>
             </a:r>
           </a:p>
           <a:p>
             <a:pPr lvl="1"/>
             <a:r>
-              <a:rPr lang="zh-TW" altLang="en-US" smtClean="0"/>
+              <a:rPr lang="zh-TW" altLang="en-US"/>
               <a:t>第二層</a:t>
             </a:r>
           </a:p>
           <a:p>
             <a:pPr lvl="2"/>
             <a:r>
-              <a:rPr lang="zh-TW" altLang="en-US" smtClean="0"/>
+              <a:rPr lang="zh-TW" altLang="en-US"/>
               <a:t>第三層</a:t>
             </a:r>
           </a:p>
           <a:p>
             <a:pPr lvl="3"/>
             <a:r>
-              <a:rPr lang="zh-TW" altLang="en-US" smtClean="0"/>
+              <a:rPr lang="zh-TW" altLang="en-US"/>
               <a:t>第四層</a:t>
             </a:r>
           </a:p>
           <a:p>
             <a:pPr lvl="4"/>
             <a:r>
-              <a:rPr lang="zh-TW" altLang="en-US" smtClean="0"/>
+              <a:rPr lang="zh-TW" altLang="en-US"/>
               <a:t>第五層</a:t>
             </a:r>
-            <a:endParaRPr lang="zh-TW" altLang="en-US"/>
           </a:p>
         </p:txBody>
       </p:sp>
@@ -480,7 +476,7 @@
             <a:fld id="{56B17361-AFF9-4A50-8FA1-CCBB1A96AC9B}" type="datetimeFigureOut">
               <a:rPr lang="zh-TW" altLang="en-US" smtClean="0"/>
               <a:pPr/>
-              <a:t>2023/4/22</a:t>
+              <a:t>2024/4/24</a:t>
             </a:fld>
             <a:endParaRPr lang="zh-TW" altLang="en-US"/>
           </a:p>
@@ -575,10 +571,9 @@
           <a:lstStyle/>
           <a:p>
             <a:r>
-              <a:rPr lang="zh-TW" altLang="en-US" smtClean="0"/>
+              <a:rPr lang="zh-TW" altLang="en-US"/>
               <a:t>按一下以編輯母片標題樣式</a:t>
             </a:r>
-            <a:endParaRPr lang="zh-TW" altLang="en-US"/>
           </a:p>
         </p:txBody>
       </p:sp>
@@ -604,38 +599,37 @@
           <a:p>
             <a:pPr lvl="0"/>
             <a:r>
-              <a:rPr lang="zh-TW" altLang="en-US" smtClean="0"/>
+              <a:rPr lang="zh-TW" altLang="en-US"/>
               <a:t>按一下以編輯母片文字樣式</a:t>
             </a:r>
           </a:p>
           <a:p>
             <a:pPr lvl="1"/>
             <a:r>
-              <a:rPr lang="zh-TW" altLang="en-US" smtClean="0"/>
+              <a:rPr lang="zh-TW" altLang="en-US"/>
               <a:t>第二層</a:t>
             </a:r>
           </a:p>
           <a:p>
             <a:pPr lvl="2"/>
             <a:r>
-              <a:rPr lang="zh-TW" altLang="en-US" smtClean="0"/>
+              <a:rPr lang="zh-TW" altLang="en-US"/>
               <a:t>第三層</a:t>
             </a:r>
           </a:p>
           <a:p>
             <a:pPr lvl="3"/>
             <a:r>
-              <a:rPr lang="zh-TW" altLang="en-US" smtClean="0"/>
+              <a:rPr lang="zh-TW" altLang="en-US"/>
               <a:t>第四層</a:t>
             </a:r>
           </a:p>
           <a:p>
             <a:pPr lvl="4"/>
             <a:r>
-              <a:rPr lang="zh-TW" altLang="en-US" smtClean="0"/>
+              <a:rPr lang="zh-TW" altLang="en-US"/>
               <a:t>第五層</a:t>
             </a:r>
-            <a:endParaRPr lang="zh-TW" altLang="en-US"/>
           </a:p>
         </p:txBody>
       </p:sp>
@@ -657,7 +651,7 @@
             <a:fld id="{56B17361-AFF9-4A50-8FA1-CCBB1A96AC9B}" type="datetimeFigureOut">
               <a:rPr lang="zh-TW" altLang="en-US" smtClean="0"/>
               <a:pPr/>
-              <a:t>2023/4/22</a:t>
+              <a:t>2024/4/24</a:t>
             </a:fld>
             <a:endParaRPr lang="zh-TW" altLang="en-US"/>
           </a:p>
@@ -747,10 +741,9 @@
           <a:lstStyle/>
           <a:p>
             <a:r>
-              <a:rPr lang="zh-TW" altLang="en-US" smtClean="0"/>
+              <a:rPr lang="zh-TW" altLang="en-US"/>
               <a:t>按一下以編輯母片標題樣式</a:t>
             </a:r>
-            <a:endParaRPr lang="zh-TW" altLang="en-US"/>
           </a:p>
         </p:txBody>
       </p:sp>
@@ -771,38 +764,37 @@
           <a:p>
             <a:pPr lvl="0"/>
             <a:r>
-              <a:rPr lang="zh-TW" altLang="en-US" smtClean="0"/>
+              <a:rPr lang="zh-TW" altLang="en-US"/>
               <a:t>按一下以編輯母片文字樣式</a:t>
             </a:r>
           </a:p>
           <a:p>
             <a:pPr lvl="1"/>
             <a:r>
-              <a:rPr lang="zh-TW" altLang="en-US" smtClean="0"/>
+              <a:rPr lang="zh-TW" altLang="en-US"/>
               <a:t>第二層</a:t>
             </a:r>
           </a:p>
           <a:p>
             <a:pPr lvl="2"/>
             <a:r>
-              <a:rPr lang="zh-TW" altLang="en-US" smtClean="0"/>
+              <a:rPr lang="zh-TW" altLang="en-US"/>
               <a:t>第三層</a:t>
             </a:r>
           </a:p>
           <a:p>
             <a:pPr lvl="3"/>
             <a:r>
-              <a:rPr lang="zh-TW" altLang="en-US" smtClean="0"/>
+              <a:rPr lang="zh-TW" altLang="en-US"/>
               <a:t>第四層</a:t>
             </a:r>
           </a:p>
           <a:p>
             <a:pPr lvl="4"/>
             <a:r>
-              <a:rPr lang="zh-TW" altLang="en-US" smtClean="0"/>
+              <a:rPr lang="zh-TW" altLang="en-US"/>
               <a:t>第五層</a:t>
             </a:r>
-            <a:endParaRPr lang="zh-TW" altLang="en-US"/>
           </a:p>
         </p:txBody>
       </p:sp>
@@ -824,7 +816,7 @@
             <a:fld id="{56B17361-AFF9-4A50-8FA1-CCBB1A96AC9B}" type="datetimeFigureOut">
               <a:rPr lang="zh-TW" altLang="en-US" smtClean="0"/>
               <a:pPr/>
-              <a:t>2023/4/22</a:t>
+              <a:t>2024/4/24</a:t>
             </a:fld>
             <a:endParaRPr lang="zh-TW" altLang="en-US"/>
           </a:p>
@@ -923,10 +915,9 @@
           </a:lstStyle>
           <a:p>
             <a:r>
-              <a:rPr lang="zh-TW" altLang="en-US" smtClean="0"/>
+              <a:rPr lang="zh-TW" altLang="en-US"/>
               <a:t>按一下以編輯母片標題樣式</a:t>
             </a:r>
-            <a:endParaRPr lang="zh-TW" altLang="en-US"/>
           </a:p>
         </p:txBody>
       </p:sp>
@@ -1043,7 +1034,7 @@
           <a:p>
             <a:pPr lvl="0"/>
             <a:r>
-              <a:rPr lang="zh-TW" altLang="en-US" smtClean="0"/>
+              <a:rPr lang="zh-TW" altLang="en-US"/>
               <a:t>按一下以編輯母片文字樣式</a:t>
             </a:r>
           </a:p>
@@ -1067,7 +1058,7 @@
             <a:fld id="{56B17361-AFF9-4A50-8FA1-CCBB1A96AC9B}" type="datetimeFigureOut">
               <a:rPr lang="zh-TW" altLang="en-US" smtClean="0"/>
               <a:pPr/>
-              <a:t>2023/4/22</a:t>
+              <a:t>2024/4/24</a:t>
             </a:fld>
             <a:endParaRPr lang="zh-TW" altLang="en-US"/>
           </a:p>
@@ -1157,10 +1148,9 @@
           <a:lstStyle/>
           <a:p>
             <a:r>
-              <a:rPr lang="zh-TW" altLang="en-US" smtClean="0"/>
+              <a:rPr lang="zh-TW" altLang="en-US"/>
               <a:t>按一下以編輯母片標題樣式</a:t>
             </a:r>
-            <a:endParaRPr lang="zh-TW" altLang="en-US"/>
           </a:p>
         </p:txBody>
       </p:sp>
@@ -1214,38 +1204,37 @@
           <a:p>
             <a:pPr lvl="0"/>
             <a:r>
-              <a:rPr lang="zh-TW" altLang="en-US" smtClean="0"/>
+              <a:rPr lang="zh-TW" altLang="en-US"/>
               <a:t>按一下以編輯母片文字樣式</a:t>
             </a:r>
           </a:p>
           <a:p>
             <a:pPr lvl="1"/>
             <a:r>
-              <a:rPr lang="zh-TW" altLang="en-US" smtClean="0"/>
+              <a:rPr lang="zh-TW" altLang="en-US"/>
               <a:t>第二層</a:t>
             </a:r>
           </a:p>
           <a:p>
             <a:pPr lvl="2"/>
             <a:r>
-              <a:rPr lang="zh-TW" altLang="en-US" smtClean="0"/>
+              <a:rPr lang="zh-TW" altLang="en-US"/>
               <a:t>第三層</a:t>
             </a:r>
           </a:p>
           <a:p>
             <a:pPr lvl="3"/>
             <a:r>
-              <a:rPr lang="zh-TW" altLang="en-US" smtClean="0"/>
+              <a:rPr lang="zh-TW" altLang="en-US"/>
               <a:t>第四層</a:t>
             </a:r>
           </a:p>
           <a:p>
             <a:pPr lvl="4"/>
             <a:r>
-              <a:rPr lang="zh-TW" altLang="en-US" smtClean="0"/>
+              <a:rPr lang="zh-TW" altLang="en-US"/>
               <a:t>第五層</a:t>
             </a:r>
-            <a:endParaRPr lang="zh-TW" altLang="en-US"/>
           </a:p>
         </p:txBody>
       </p:sp>
@@ -1299,38 +1288,37 @@
           <a:p>
             <a:pPr lvl="0"/>
             <a:r>
-              <a:rPr lang="zh-TW" altLang="en-US" smtClean="0"/>
+              <a:rPr lang="zh-TW" altLang="en-US"/>
               <a:t>按一下以編輯母片文字樣式</a:t>
             </a:r>
           </a:p>
           <a:p>
             <a:pPr lvl="1"/>
             <a:r>
-              <a:rPr lang="zh-TW" altLang="en-US" smtClean="0"/>
+              <a:rPr lang="zh-TW" altLang="en-US"/>
               <a:t>第二層</a:t>
             </a:r>
           </a:p>
           <a:p>
             <a:pPr lvl="2"/>
             <a:r>
-              <a:rPr lang="zh-TW" altLang="en-US" smtClean="0"/>
+              <a:rPr lang="zh-TW" altLang="en-US"/>
               <a:t>第三層</a:t>
             </a:r>
           </a:p>
           <a:p>
             <a:pPr lvl="3"/>
             <a:r>
-              <a:rPr lang="zh-TW" altLang="en-US" smtClean="0"/>
+              <a:rPr lang="zh-TW" altLang="en-US"/>
               <a:t>第四層</a:t>
             </a:r>
           </a:p>
           <a:p>
             <a:pPr lvl="4"/>
             <a:r>
-              <a:rPr lang="zh-TW" altLang="en-US" smtClean="0"/>
+              <a:rPr lang="zh-TW" altLang="en-US"/>
               <a:t>第五層</a:t>
             </a:r>
-            <a:endParaRPr lang="zh-TW" altLang="en-US"/>
           </a:p>
         </p:txBody>
       </p:sp>
@@ -1352,7 +1340,7 @@
             <a:fld id="{56B17361-AFF9-4A50-8FA1-CCBB1A96AC9B}" type="datetimeFigureOut">
               <a:rPr lang="zh-TW" altLang="en-US" smtClean="0"/>
               <a:pPr/>
-              <a:t>2023/4/22</a:t>
+              <a:t>2024/4/24</a:t>
             </a:fld>
             <a:endParaRPr lang="zh-TW" altLang="en-US"/>
           </a:p>
@@ -1446,10 +1434,9 @@
           </a:lstStyle>
           <a:p>
             <a:r>
-              <a:rPr lang="zh-TW" altLang="en-US" smtClean="0"/>
+              <a:rPr lang="zh-TW" altLang="en-US"/>
               <a:t>按一下以編輯母片標題樣式</a:t>
             </a:r>
-            <a:endParaRPr lang="zh-TW" altLang="en-US"/>
           </a:p>
         </p:txBody>
       </p:sp>
@@ -1512,7 +1499,7 @@
           <a:p>
             <a:pPr lvl="0"/>
             <a:r>
-              <a:rPr lang="zh-TW" altLang="en-US" smtClean="0"/>
+              <a:rPr lang="zh-TW" altLang="en-US"/>
               <a:t>按一下以編輯母片文字樣式</a:t>
             </a:r>
           </a:p>
@@ -1568,38 +1555,37 @@
           <a:p>
             <a:pPr lvl="0"/>
             <a:r>
-              <a:rPr lang="zh-TW" altLang="en-US" smtClean="0"/>
+              <a:rPr lang="zh-TW" altLang="en-US"/>
               <a:t>按一下以編輯母片文字樣式</a:t>
             </a:r>
           </a:p>
           <a:p>
             <a:pPr lvl="1"/>
             <a:r>
-              <a:rPr lang="zh-TW" altLang="en-US" smtClean="0"/>
+              <a:rPr lang="zh-TW" altLang="en-US"/>
               <a:t>第二層</a:t>
             </a:r>
           </a:p>
           <a:p>
             <a:pPr lvl="2"/>
             <a:r>
-              <a:rPr lang="zh-TW" altLang="en-US" smtClean="0"/>
+              <a:rPr lang="zh-TW" altLang="en-US"/>
               <a:t>第三層</a:t>
             </a:r>
           </a:p>
           <a:p>
             <a:pPr lvl="3"/>
             <a:r>
-              <a:rPr lang="zh-TW" altLang="en-US" smtClean="0"/>
+              <a:rPr lang="zh-TW" altLang="en-US"/>
               <a:t>第四層</a:t>
             </a:r>
           </a:p>
           <a:p>
             <a:pPr lvl="4"/>
             <a:r>
-              <a:rPr lang="zh-TW" altLang="en-US" smtClean="0"/>
+              <a:rPr lang="zh-TW" altLang="en-US"/>
               <a:t>第五層</a:t>
             </a:r>
-            <a:endParaRPr lang="zh-TW" altLang="en-US"/>
           </a:p>
         </p:txBody>
       </p:sp>
@@ -1662,7 +1648,7 @@
           <a:p>
             <a:pPr lvl="0"/>
             <a:r>
-              <a:rPr lang="zh-TW" altLang="en-US" smtClean="0"/>
+              <a:rPr lang="zh-TW" altLang="en-US"/>
               <a:t>按一下以編輯母片文字樣式</a:t>
             </a:r>
           </a:p>
@@ -1718,38 +1704,37 @@
           <a:p>
             <a:pPr lvl="0"/>
             <a:r>
-              <a:rPr lang="zh-TW" altLang="en-US" smtClean="0"/>
+              <a:rPr lang="zh-TW" altLang="en-US"/>
               <a:t>按一下以編輯母片文字樣式</a:t>
             </a:r>
           </a:p>
           <a:p>
             <a:pPr lvl="1"/>
             <a:r>
-              <a:rPr lang="zh-TW" altLang="en-US" smtClean="0"/>
+              <a:rPr lang="zh-TW" altLang="en-US"/>
               <a:t>第二層</a:t>
             </a:r>
           </a:p>
           <a:p>
             <a:pPr lvl="2"/>
             <a:r>
-              <a:rPr lang="zh-TW" altLang="en-US" smtClean="0"/>
+              <a:rPr lang="zh-TW" altLang="en-US"/>
               <a:t>第三層</a:t>
             </a:r>
           </a:p>
           <a:p>
             <a:pPr lvl="3"/>
             <a:r>
-              <a:rPr lang="zh-TW" altLang="en-US" smtClean="0"/>
+              <a:rPr lang="zh-TW" altLang="en-US"/>
               <a:t>第四層</a:t>
             </a:r>
           </a:p>
           <a:p>
             <a:pPr lvl="4"/>
             <a:r>
-              <a:rPr lang="zh-TW" altLang="en-US" smtClean="0"/>
+              <a:rPr lang="zh-TW" altLang="en-US"/>
               <a:t>第五層</a:t>
             </a:r>
-            <a:endParaRPr lang="zh-TW" altLang="en-US"/>
           </a:p>
         </p:txBody>
       </p:sp>
@@ -1771,7 +1756,7 @@
             <a:fld id="{56B17361-AFF9-4A50-8FA1-CCBB1A96AC9B}" type="datetimeFigureOut">
               <a:rPr lang="zh-TW" altLang="en-US" smtClean="0"/>
               <a:pPr/>
-              <a:t>2023/4/22</a:t>
+              <a:t>2024/4/24</a:t>
             </a:fld>
             <a:endParaRPr lang="zh-TW" altLang="en-US"/>
           </a:p>
@@ -1861,10 +1846,9 @@
           <a:lstStyle/>
           <a:p>
             <a:r>
-              <a:rPr lang="zh-TW" altLang="en-US" smtClean="0"/>
+              <a:rPr lang="zh-TW" altLang="en-US"/>
               <a:t>按一下以編輯母片標題樣式</a:t>
             </a:r>
-            <a:endParaRPr lang="zh-TW" altLang="en-US"/>
           </a:p>
         </p:txBody>
       </p:sp>
@@ -1886,7 +1870,7 @@
             <a:fld id="{56B17361-AFF9-4A50-8FA1-CCBB1A96AC9B}" type="datetimeFigureOut">
               <a:rPr lang="zh-TW" altLang="en-US" smtClean="0"/>
               <a:pPr/>
-              <a:t>2023/4/22</a:t>
+              <a:t>2024/4/24</a:t>
             </a:fld>
             <a:endParaRPr lang="zh-TW" altLang="en-US"/>
           </a:p>
@@ -1978,7 +1962,7 @@
             <a:fld id="{56B17361-AFF9-4A50-8FA1-CCBB1A96AC9B}" type="datetimeFigureOut">
               <a:rPr lang="zh-TW" altLang="en-US" smtClean="0"/>
               <a:pPr/>
-              <a:t>2023/4/22</a:t>
+              <a:t>2024/4/24</a:t>
             </a:fld>
             <a:endParaRPr lang="zh-TW" altLang="en-US"/>
           </a:p>
@@ -2077,10 +2061,9 @@
           </a:lstStyle>
           <a:p>
             <a:r>
-              <a:rPr lang="zh-TW" altLang="en-US" smtClean="0"/>
+              <a:rPr lang="zh-TW" altLang="en-US"/>
               <a:t>按一下以編輯母片標題樣式</a:t>
             </a:r>
-            <a:endParaRPr lang="zh-TW" altLang="en-US"/>
           </a:p>
         </p:txBody>
       </p:sp>
@@ -2134,38 +2117,37 @@
           <a:p>
             <a:pPr lvl="0"/>
             <a:r>
-              <a:rPr lang="zh-TW" altLang="en-US" smtClean="0"/>
+              <a:rPr lang="zh-TW" altLang="en-US"/>
               <a:t>按一下以編輯母片文字樣式</a:t>
             </a:r>
           </a:p>
           <a:p>
             <a:pPr lvl="1"/>
             <a:r>
-              <a:rPr lang="zh-TW" altLang="en-US" smtClean="0"/>
+              <a:rPr lang="zh-TW" altLang="en-US"/>
               <a:t>第二層</a:t>
             </a:r>
           </a:p>
           <a:p>
             <a:pPr lvl="2"/>
             <a:r>
-              <a:rPr lang="zh-TW" altLang="en-US" smtClean="0"/>
+              <a:rPr lang="zh-TW" altLang="en-US"/>
               <a:t>第三層</a:t>
             </a:r>
           </a:p>
           <a:p>
             <a:pPr lvl="3"/>
             <a:r>
-              <a:rPr lang="zh-TW" altLang="en-US" smtClean="0"/>
+              <a:rPr lang="zh-TW" altLang="en-US"/>
               <a:t>第四層</a:t>
             </a:r>
           </a:p>
           <a:p>
             <a:pPr lvl="4"/>
             <a:r>
-              <a:rPr lang="zh-TW" altLang="en-US" smtClean="0"/>
+              <a:rPr lang="zh-TW" altLang="en-US"/>
               <a:t>第五層</a:t>
             </a:r>
-            <a:endParaRPr lang="zh-TW" altLang="en-US"/>
           </a:p>
         </p:txBody>
       </p:sp>
@@ -2228,7 +2210,7 @@
           <a:p>
             <a:pPr lvl="0"/>
             <a:r>
-              <a:rPr lang="zh-TW" altLang="en-US" smtClean="0"/>
+              <a:rPr lang="zh-TW" altLang="en-US"/>
               <a:t>按一下以編輯母片文字樣式</a:t>
             </a:r>
           </a:p>
@@ -2252,7 +2234,7 @@
             <a:fld id="{56B17361-AFF9-4A50-8FA1-CCBB1A96AC9B}" type="datetimeFigureOut">
               <a:rPr lang="zh-TW" altLang="en-US" smtClean="0"/>
               <a:pPr/>
-              <a:t>2023/4/22</a:t>
+              <a:t>2024/4/24</a:t>
             </a:fld>
             <a:endParaRPr lang="zh-TW" altLang="en-US"/>
           </a:p>
@@ -2351,10 +2333,9 @@
           </a:lstStyle>
           <a:p>
             <a:r>
-              <a:rPr lang="zh-TW" altLang="en-US" smtClean="0"/>
+              <a:rPr lang="zh-TW" altLang="en-US"/>
               <a:t>按一下以編輯母片標題樣式</a:t>
             </a:r>
-            <a:endParaRPr lang="zh-TW" altLang="en-US"/>
           </a:p>
         </p:txBody>
       </p:sp>
@@ -2416,10 +2397,9 @@
           </a:lstStyle>
           <a:p>
             <a:r>
-              <a:rPr lang="zh-TW" altLang="en-US" smtClean="0"/>
+              <a:rPr lang="zh-TW" altLang="en-US"/>
               <a:t>按一下圖示以新增圖片</a:t>
             </a:r>
-            <a:endParaRPr lang="zh-TW" altLang="en-US"/>
           </a:p>
         </p:txBody>
       </p:sp>
@@ -2482,7 +2462,7 @@
           <a:p>
             <a:pPr lvl="0"/>
             <a:r>
-              <a:rPr lang="zh-TW" altLang="en-US" smtClean="0"/>
+              <a:rPr lang="zh-TW" altLang="en-US"/>
               <a:t>按一下以編輯母片文字樣式</a:t>
             </a:r>
           </a:p>
@@ -2506,7 +2486,7 @@
             <a:fld id="{56B17361-AFF9-4A50-8FA1-CCBB1A96AC9B}" type="datetimeFigureOut">
               <a:rPr lang="zh-TW" altLang="en-US" smtClean="0"/>
               <a:pPr/>
-              <a:t>2023/4/22</a:t>
+              <a:t>2024/4/24</a:t>
             </a:fld>
             <a:endParaRPr lang="zh-TW" altLang="en-US"/>
           </a:p>
@@ -2616,10 +2596,9 @@
           <a:lstStyle/>
           <a:p>
             <a:r>
-              <a:rPr lang="zh-TW" altLang="en-US" smtClean="0"/>
+              <a:rPr lang="zh-TW" altLang="en-US"/>
               <a:t>按一下以編輯母片標題樣式</a:t>
             </a:r>
-            <a:endParaRPr lang="zh-TW" altLang="en-US"/>
           </a:p>
         </p:txBody>
       </p:sp>
@@ -2650,38 +2629,37 @@
           <a:p>
             <a:pPr lvl="0"/>
             <a:r>
-              <a:rPr lang="zh-TW" altLang="en-US" smtClean="0"/>
+              <a:rPr lang="zh-TW" altLang="en-US"/>
               <a:t>按一下以編輯母片文字樣式</a:t>
             </a:r>
           </a:p>
           <a:p>
             <a:pPr lvl="1"/>
             <a:r>
-              <a:rPr lang="zh-TW" altLang="en-US" smtClean="0"/>
+              <a:rPr lang="zh-TW" altLang="en-US"/>
               <a:t>第二層</a:t>
             </a:r>
           </a:p>
           <a:p>
             <a:pPr lvl="2"/>
             <a:r>
-              <a:rPr lang="zh-TW" altLang="en-US" smtClean="0"/>
+              <a:rPr lang="zh-TW" altLang="en-US"/>
               <a:t>第三層</a:t>
             </a:r>
           </a:p>
           <a:p>
             <a:pPr lvl="3"/>
             <a:r>
-              <a:rPr lang="zh-TW" altLang="en-US" smtClean="0"/>
+              <a:rPr lang="zh-TW" altLang="en-US"/>
               <a:t>第四層</a:t>
             </a:r>
           </a:p>
           <a:p>
             <a:pPr lvl="4"/>
             <a:r>
-              <a:rPr lang="zh-TW" altLang="en-US" smtClean="0"/>
+              <a:rPr lang="zh-TW" altLang="en-US"/>
               <a:t>第五層</a:t>
             </a:r>
-            <a:endParaRPr lang="zh-TW" altLang="en-US"/>
           </a:p>
         </p:txBody>
       </p:sp>
@@ -2721,7 +2699,7 @@
             <a:fld id="{56B17361-AFF9-4A50-8FA1-CCBB1A96AC9B}" type="datetimeFigureOut">
               <a:rPr lang="zh-TW" altLang="en-US" smtClean="0"/>
               <a:pPr/>
-              <a:t>2023/4/22</a:t>
+              <a:t>2024/4/24</a:t>
             </a:fld>
             <a:endParaRPr lang="zh-TW" altLang="en-US"/>
           </a:p>
@@ -3129,24 +3107,7 @@
                 <a:latin typeface="微軟正黑體" pitchFamily="34" charset="-120"/>
                 <a:ea typeface="微軟正黑體" pitchFamily="34" charset="-120"/>
               </a:rPr>
-              <a:t>活</a:t>
-            </a:r>
-            <a:r>
-              <a:rPr lang="zh-TW" altLang="en-US" sz="7200" b="1" i="1" dirty="0">
-                <a:solidFill>
-                  <a:srgbClr val="000066"/>
-                </a:solidFill>
-                <a:effectLst>
-                  <a:outerShdw blurRad="38100" dist="38100" dir="2700000" algn="tl">
-                    <a:srgbClr val="000000">
-                      <a:alpha val="43137"/>
-                    </a:srgbClr>
-                  </a:outerShdw>
-                </a:effectLst>
-                <a:latin typeface="微軟正黑體" pitchFamily="34" charset="-120"/>
-                <a:ea typeface="微軟正黑體" pitchFamily="34" charset="-120"/>
-              </a:rPr>
-              <a:t>著為耶穌</a:t>
+              <a:t>活著為耶穌</a:t>
             </a:r>
           </a:p>
         </p:txBody>
@@ -3257,7 +3218,7 @@
         <p:spPr>
           <a:xfrm>
             <a:off x="0" y="5157192"/>
-            <a:ext cx="12192000" cy="666786"/>
+            <a:ext cx="12192000" cy="584775"/>
           </a:xfrm>
           <a:prstGeom prst="rect">
             <a:avLst/>
@@ -3272,7 +3233,7 @@
           <a:p>
             <a:pPr algn="ctr"/>
             <a:r>
-              <a:rPr lang="en-US" sz="3733" b="1" dirty="0">
+              <a:rPr lang="en-US" sz="3200" b="1" dirty="0">
                 <a:solidFill>
                   <a:srgbClr val="000066"/>
                 </a:solidFill>
@@ -3282,17 +3243,17 @@
               <a:t>( </a:t>
             </a:r>
             <a:r>
-              <a:rPr lang="zh-CN" altLang="en-US" sz="3733" b="1" dirty="0">
+              <a:rPr lang="zh-CN" altLang="en-US" sz="3200" b="1" dirty="0">
                 <a:solidFill>
                   <a:srgbClr val="000066"/>
                 </a:solidFill>
                 <a:latin typeface="Microsoft JhengHei" panose="020B0604030504040204" pitchFamily="34" charset="-120"/>
                 <a:ea typeface="Microsoft JhengHei" panose="020B0604030504040204" pitchFamily="34" charset="-120"/>
               </a:rPr>
-              <a:t>正 </a:t>
-            </a:r>
-            <a:r>
-              <a:rPr lang="en-US" altLang="zh-CN" sz="3733" b="1" dirty="0">
+              <a:t>正歌 </a:t>
+            </a:r>
+            <a:r>
+              <a:rPr lang="en-US" altLang="zh-CN" sz="3200" b="1" dirty="0">
                 <a:solidFill>
                   <a:srgbClr val="000066"/>
                 </a:solidFill>
@@ -3302,7 +3263,7 @@
               <a:t>1</a:t>
             </a:r>
             <a:r>
-              <a:rPr lang="en-US" sz="3733" b="1" dirty="0">
+              <a:rPr lang="en-US" sz="3200" b="1" dirty="0">
                 <a:solidFill>
                   <a:srgbClr val="000066"/>
                 </a:solidFill>
@@ -3311,7 +3272,7 @@
               </a:rPr>
               <a:t> )</a:t>
             </a:r>
-            <a:endParaRPr lang="vi-VN" sz="3733" b="1" dirty="0">
+            <a:endParaRPr lang="vi-VN" sz="3200" b="1" dirty="0">
               <a:solidFill>
                 <a:srgbClr val="000066"/>
               </a:solidFill>
@@ -3407,13 +3368,6 @@
               </a:rPr>
               <a:t>活著為耶穌  主在旁</a:t>
             </a:r>
-            <a:endParaRPr lang="zh-TW" altLang="en-US" sz="6400" b="1" dirty="0">
-              <a:solidFill>
-                <a:srgbClr val="000066"/>
-              </a:solidFill>
-              <a:latin typeface="微軟正黑體" pitchFamily="34" charset="-120"/>
-              <a:ea typeface="微軟正黑體" pitchFamily="34" charset="-120"/>
-            </a:endParaRPr>
           </a:p>
         </p:txBody>
       </p:sp>
@@ -3426,7 +3380,7 @@
         <p:spPr>
           <a:xfrm>
             <a:off x="0" y="5157192"/>
-            <a:ext cx="12192000" cy="666786"/>
+            <a:ext cx="12192000" cy="584775"/>
           </a:xfrm>
           <a:prstGeom prst="rect">
             <a:avLst/>
@@ -3441,7 +3395,7 @@
           <a:p>
             <a:pPr algn="ctr"/>
             <a:r>
-              <a:rPr lang="en-US" sz="3733" b="1" dirty="0">
+              <a:rPr lang="en-US" sz="3200" b="1" dirty="0">
                 <a:solidFill>
                   <a:srgbClr val="000066"/>
                 </a:solidFill>
@@ -3451,17 +3405,17 @@
               <a:t>( </a:t>
             </a:r>
             <a:r>
-              <a:rPr lang="zh-CN" altLang="en-US" sz="3733" b="1" dirty="0">
+              <a:rPr lang="zh-CN" altLang="en-US" sz="3200" b="1" dirty="0">
                 <a:solidFill>
                   <a:srgbClr val="000066"/>
                 </a:solidFill>
                 <a:latin typeface="Microsoft JhengHei" panose="020B0604030504040204" pitchFamily="34" charset="-120"/>
                 <a:ea typeface="Microsoft JhengHei" panose="020B0604030504040204" pitchFamily="34" charset="-120"/>
               </a:rPr>
-              <a:t>正 </a:t>
-            </a:r>
-            <a:r>
-              <a:rPr lang="en-US" altLang="zh-CN" sz="3733" b="1">
+              <a:t>正歌 </a:t>
+            </a:r>
+            <a:r>
+              <a:rPr lang="en-US" altLang="zh-CN" sz="3200" b="1" dirty="0">
                 <a:solidFill>
                   <a:srgbClr val="000066"/>
                 </a:solidFill>
@@ -3471,26 +3425,16 @@
               <a:t>1</a:t>
             </a:r>
             <a:r>
-              <a:rPr lang="en-US" sz="3733" b="1">
+              <a:rPr lang="en-US" sz="3200" b="1" dirty="0">
                 <a:solidFill>
                   <a:srgbClr val="000066"/>
                 </a:solidFill>
                 <a:latin typeface="Microsoft JhengHei" panose="020B0604030504040204" pitchFamily="34" charset="-120"/>
                 <a:ea typeface="Microsoft JhengHei" panose="020B0604030504040204" pitchFamily="34" charset="-120"/>
               </a:rPr>
-              <a:t> </a:t>
-            </a:r>
-            <a:r>
-              <a:rPr lang="en-US" sz="3733" b="1" dirty="0">
-                <a:solidFill>
-                  <a:srgbClr val="000066"/>
-                </a:solidFill>
-                <a:latin typeface="Microsoft JhengHei" panose="020B0604030504040204" pitchFamily="34" charset="-120"/>
-                <a:ea typeface="Microsoft JhengHei" panose="020B0604030504040204" pitchFamily="34" charset="-120"/>
-              </a:rPr>
-              <a:t>)</a:t>
-            </a:r>
-            <a:endParaRPr lang="vi-VN" sz="3733" b="1" dirty="0">
+              <a:t> )</a:t>
+            </a:r>
+            <a:endParaRPr lang="vi-VN" sz="3200" b="1" dirty="0">
               <a:solidFill>
                 <a:srgbClr val="000066"/>
               </a:solidFill>
@@ -3683,13 +3627,6 @@
               </a:rPr>
               <a:t>永遠跟隨主不轉離</a:t>
             </a:r>
-            <a:endParaRPr lang="zh-TW" altLang="en-US" sz="6400" b="1" dirty="0">
-              <a:solidFill>
-                <a:srgbClr val="000066"/>
-              </a:solidFill>
-              <a:latin typeface="微軟正黑體" pitchFamily="34" charset="-120"/>
-              <a:ea typeface="微軟正黑體" pitchFamily="34" charset="-120"/>
-            </a:endParaRPr>
           </a:p>
         </p:txBody>
       </p:sp>
@@ -3799,7 +3736,7 @@
         <p:spPr>
           <a:xfrm>
             <a:off x="0" y="5157192"/>
-            <a:ext cx="12192000" cy="666786"/>
+            <a:ext cx="12192000" cy="584775"/>
           </a:xfrm>
           <a:prstGeom prst="rect">
             <a:avLst/>
@@ -3814,7 +3751,7 @@
           <a:p>
             <a:pPr algn="ctr"/>
             <a:r>
-              <a:rPr lang="en-US" sz="3733" b="1" dirty="0">
+              <a:rPr lang="en-US" sz="3200" b="1" dirty="0">
                 <a:solidFill>
                   <a:srgbClr val="000066"/>
                 </a:solidFill>
@@ -3824,17 +3761,17 @@
               <a:t>( </a:t>
             </a:r>
             <a:r>
-              <a:rPr lang="zh-CN" altLang="en-US" sz="3733" b="1" dirty="0">
+              <a:rPr lang="zh-CN" altLang="en-US" sz="3200" b="1" dirty="0">
                 <a:solidFill>
                   <a:srgbClr val="000066"/>
                 </a:solidFill>
                 <a:latin typeface="Microsoft JhengHei" panose="020B0604030504040204" pitchFamily="34" charset="-120"/>
                 <a:ea typeface="Microsoft JhengHei" panose="020B0604030504040204" pitchFamily="34" charset="-120"/>
               </a:rPr>
-              <a:t>正 </a:t>
-            </a:r>
-            <a:r>
-              <a:rPr lang="en-US" altLang="zh-CN" sz="3733" b="1" dirty="0">
+              <a:t>正歌 </a:t>
+            </a:r>
+            <a:r>
+              <a:rPr lang="en-US" altLang="zh-CN" sz="3200" b="1" dirty="0">
                 <a:solidFill>
                   <a:srgbClr val="000066"/>
                 </a:solidFill>
@@ -3844,7 +3781,7 @@
               <a:t>2</a:t>
             </a:r>
             <a:r>
-              <a:rPr lang="en-US" sz="3733" b="1" dirty="0">
+              <a:rPr lang="en-US" sz="3200" b="1" dirty="0">
                 <a:solidFill>
                   <a:srgbClr val="000066"/>
                 </a:solidFill>
@@ -3853,7 +3790,7 @@
               </a:rPr>
               <a:t> )</a:t>
             </a:r>
-            <a:endParaRPr lang="vi-VN" sz="3733" b="1" dirty="0">
+            <a:endParaRPr lang="vi-VN" sz="3200" b="1" dirty="0">
               <a:solidFill>
                 <a:srgbClr val="000066"/>
               </a:solidFill>
@@ -3949,13 +3886,6 @@
               </a:rPr>
               <a:t>直到我走完  世路程</a:t>
             </a:r>
-            <a:endParaRPr lang="zh-TW" altLang="en-US" sz="6400" b="1" dirty="0">
-              <a:solidFill>
-                <a:srgbClr val="000066"/>
-              </a:solidFill>
-              <a:latin typeface="微軟正黑體" pitchFamily="34" charset="-120"/>
-              <a:ea typeface="微軟正黑體" pitchFamily="34" charset="-120"/>
-            </a:endParaRPr>
           </a:p>
         </p:txBody>
       </p:sp>
@@ -3968,7 +3898,7 @@
         <p:spPr>
           <a:xfrm>
             <a:off x="0" y="5157192"/>
-            <a:ext cx="12192000" cy="666786"/>
+            <a:ext cx="12192000" cy="584775"/>
           </a:xfrm>
           <a:prstGeom prst="rect">
             <a:avLst/>
@@ -3983,7 +3913,7 @@
           <a:p>
             <a:pPr algn="ctr"/>
             <a:r>
-              <a:rPr lang="en-US" sz="3733" b="1" dirty="0">
+              <a:rPr lang="en-US" sz="3200" b="1" dirty="0">
                 <a:solidFill>
                   <a:srgbClr val="000066"/>
                 </a:solidFill>
@@ -3993,17 +3923,17 @@
               <a:t>( </a:t>
             </a:r>
             <a:r>
-              <a:rPr lang="zh-CN" altLang="en-US" sz="3733" b="1" dirty="0">
+              <a:rPr lang="zh-CN" altLang="en-US" sz="3200" b="1" dirty="0">
                 <a:solidFill>
                   <a:srgbClr val="000066"/>
                 </a:solidFill>
                 <a:latin typeface="Microsoft JhengHei" panose="020B0604030504040204" pitchFamily="34" charset="-120"/>
                 <a:ea typeface="Microsoft JhengHei" panose="020B0604030504040204" pitchFamily="34" charset="-120"/>
               </a:rPr>
-              <a:t>正 </a:t>
-            </a:r>
-            <a:r>
-              <a:rPr lang="en-US" altLang="zh-CN" sz="3733" b="1" dirty="0">
+              <a:t>正歌 </a:t>
+            </a:r>
+            <a:r>
+              <a:rPr lang="en-US" altLang="zh-CN" sz="3200" b="1" dirty="0">
                 <a:solidFill>
                   <a:srgbClr val="000066"/>
                 </a:solidFill>
@@ -4013,7 +3943,7 @@
               <a:t>2</a:t>
             </a:r>
             <a:r>
-              <a:rPr lang="en-US" sz="3733" b="1" dirty="0">
+              <a:rPr lang="en-US" sz="3200" b="1" dirty="0">
                 <a:solidFill>
                   <a:srgbClr val="000066"/>
                 </a:solidFill>
@@ -4022,7 +3952,7 @@
               </a:rPr>
               <a:t> )</a:t>
             </a:r>
-            <a:endParaRPr lang="vi-VN" sz="3733" b="1" dirty="0">
+            <a:endParaRPr lang="vi-VN" sz="3200" b="1" dirty="0">
               <a:solidFill>
                 <a:srgbClr val="000066"/>
               </a:solidFill>
@@ -4215,13 +4145,6 @@
               </a:rPr>
               <a:t>永遠跟隨主不轉離</a:t>
             </a:r>
-            <a:endParaRPr lang="zh-TW" altLang="en-US" sz="6400" b="1" dirty="0">
-              <a:solidFill>
-                <a:srgbClr val="000066"/>
-              </a:solidFill>
-              <a:latin typeface="微軟正黑體" pitchFamily="34" charset="-120"/>
-              <a:ea typeface="微軟正黑體" pitchFamily="34" charset="-120"/>
-            </a:endParaRPr>
           </a:p>
         </p:txBody>
       </p:sp>
